--- a/buildathon-deck-en.pptx
+++ b/buildathon-deck-en.pptx
@@ -4096,7 +4096,7 @@
                 </a:solidFill>
                 <a:latin typeface="Helvetica Neue"/>
               </a:rPr>
-              <a:t>2 fixed slots/week · 30 min each + 1 IRL day/week at the Commons House</a:t>
+              <a:t>Weekly "ship + visibility" cadence + 2 fixed slots + 1 IRL day at the Commons House</a:t>
             </a:r>
           </a:p>
         </p:txBody>
@@ -4164,7 +4164,7 @@
                 </a:solidFill>
                 <a:latin typeface="Helvetica Neue"/>
               </a:rPr>
-              <a:t>Why 2 fixed slots + 1 IRL day: creates a heartbeat for the cohort (online + offline), makes mentor scheduling sane, lets teams plan their week. The day at the Commons House breaks the full-online isolation and creates cross-team bonds. The async Discord covers everything else.</a:t>
+              <a:t>🚢 Weekly Ship Cadence (Guillaume)</a:t>
             </a:r>
           </a:p>
         </p:txBody>
@@ -4177,7 +4177,7 @@
         </p:nvSpPr>
         <p:spPr>
           <a:xfrm>
-            <a:off x="502920" y="4181856"/>
+            <a:off x="502920" y="3438144"/>
             <a:ext cx="11185855" cy="2286000"/>
           </a:xfrm>
           <a:prstGeom prst="rect">
@@ -4203,7 +4203,7 @@
                 </a:solidFill>
                 <a:latin typeface="Helvetica Neue"/>
               </a:rPr>
-              <a:t>• 🏠 Build at the Commons House — 1 day per week, come build your project at our office. IRL coworking open to Paris-based teams (or in transit), in-person access to XRPL Commons mentors, lunch on site. Fixed day TBD (…</a:t>
+              <a:t>• Each team ships every week: (1) short video (60-120s) of progress · (2) single-slide deck · (3) user feedback on socials (X post with connected wallet + XRP profile for traceability)</a:t>
             </a:r>
           </a:p>
           <a:p>
@@ -4219,7 +4219,7 @@
                 </a:solidFill>
                 <a:latin typeface="Helvetica Neue"/>
               </a:rPr>
-              <a:t>• Tuesday 11:00–11:30 CET — Tech Office Hour (XRPL devrel + Ripple infra). Topics: XLS-66 / XLS-65 / XLS-70 specs, code review, integration debugging. Live group call (Zoom), recorded.</a:t>
+              <a:t>• XRPL Commons amplifies: weekly push of the top 5 or 10 on its channels + single public link to view all submissions</a:t>
             </a:r>
           </a:p>
           <a:p>
@@ -4235,39 +4235,7 @@
                 </a:solidFill>
                 <a:latin typeface="Helvetica Neue"/>
               </a:rPr>
-              <a:t>• Thursday 16:00–16:30 CET — Product / GTM Office Hour (XRPL Commons + Aquarium alum). Topics: positioning, pitch shaping, distribution strategy, RLUSD/CEX integrations. Live group call, recorded.</a:t>
-            </a:r>
-          </a:p>
-          <a:p>
-            <a:pPr>
-              <a:spcAft>
-                <a:spcPts val="400"/>
-              </a:spcAft>
-            </a:pPr>
-            <a:r>
-              <a:rPr sz="1200">
-                <a:solidFill>
-                  <a:srgbClr val="0E1116"/>
-                </a:solidFill>
-                <a:latin typeface="Helvetica Neue"/>
-              </a:rPr>
-              <a:t>• On-demand AMA — async via dedicated Discord channel. ≤24h response from a rotating mentor pool of ~10 people.</a:t>
-            </a:r>
-          </a:p>
-          <a:p>
-            <a:pPr>
-              <a:spcAft>
-                <a:spcPts val="400"/>
-              </a:spcAft>
-            </a:pPr>
-            <a:r>
-              <a:rPr sz="1200">
-                <a:solidFill>
-                  <a:srgbClr val="0E1116"/>
-                </a:solidFill>
-                <a:latin typeface="Helvetica Neue"/>
-              </a:rPr>
-              <a:t>• 1:1 office hours bookable via shared Calendly (max 30min/week per team) — for product strategy, IP/legal, fundraising prep.</a:t>
+              <a:t>• Merch reward for the best comments / feedback received by each team (qualified-feedback verification: connected wallet, active XRP profile, no bots)</a:t>
             </a:r>
           </a:p>
         </p:txBody>
@@ -5024,7 +4992,7 @@
                 </a:solidFill>
                 <a:latin typeface="Helvetica Neue"/>
               </a:rPr>
-              <a:t>Variant 1 · Hybrid · annual flagship + continuous waves</a:t>
+              <a:t>Variant 1 · Buildathon 30x · Hybrid milestone-grants + XRPL Commons journey</a:t>
             </a:r>
           </a:p>
         </p:txBody>
@@ -5058,7 +5026,7 @@
                 </a:solidFill>
                 <a:latin typeface="Helvetica Neue"/>
               </a:rPr>
-              <a:t>Combines Colosseum model (B) + Akindo (C) — most complete, most ambitious</a:t>
+              <a:t>Simple format, $100k annual pool, milestone-based, integrated in the Academy → Aquarium → Startup Studio journey</a:t>
             </a:r>
           </a:p>
         </p:txBody>
@@ -5131,7 +5099,7 @@
                 </a:solidFill>
                 <a:latin typeface="Helvetica Neue"/>
               </a:rPr>
-              <a:t>• Annual flagship Buildathon · 30 days online · curated selection 30-50 teams · IRL finale at Apex · prize pool $300-500k cash + pre-seed investment top 5 ($50k × 5 = $250k)</a:t>
+              <a:t>• 30-day online Buildathon · open (no curated selection) · target a few hundred → ~1000 users on mainnet per project · mandatory live-traction gate (mainnet deployed + measurable on-chain activity via SourceTag by day…</a:t>
             </a:r>
           </a:p>
           <a:p>
@@ -5147,7 +5115,7 @@
                 </a:solidFill>
                 <a:latin typeface="Helvetica Neue"/>
               </a:rPr>
-              <a:t>• Continuous waves (2-3 per year, between flagships) · 14 days each · pool $50-100k per wave distributed on-chain (RLUSD) to 20-30 projects · milestone-based · no formal jury, community vote</a:t>
+              <a:t>• $100k pool · hybrid structure (cf. Section 05): 5 major prizes × $10k milestone-based ($3k upfront + $3k M1 + $4k M2) = $50k</a:t>
             </a:r>
           </a:p>
           <a:p>
@@ -5163,7 +5131,23 @@
                 </a:solidFill>
                 <a:latin typeface="Helvetica Neue"/>
               </a:rPr>
-              <a:t>• Post-flagship accelerator · 8 weeks for top 5 of the flagship · XRPL Commons + Ripple Ventures mentorship · target PMF + first seed round</a:t>
+              <a:t>• Up to 100 small prizes × €500 = $50k</a:t>
+            </a:r>
+          </a:p>
+          <a:p>
+            <a:pPr>
+              <a:spcAft>
+                <a:spcPts val="400"/>
+              </a:spcAft>
+            </a:pPr>
+            <a:r>
+              <a:rPr sz="1200">
+                <a:solidFill>
+                  <a:srgbClr val="0E1116"/>
+                </a:solidFill>
+                <a:latin typeface="Helvetica Neue"/>
+              </a:rPr>
+              <a:t>• Aquarium access (perk) for the 1st major prize</a:t>
             </a:r>
           </a:p>
         </p:txBody>
@@ -5906,7 +5890,7 @@
                 </a:solidFill>
                 <a:latin typeface="Helvetica Neue"/>
               </a:rPr>
-              <a:t>Building zone</a:t>
+              <a:t>Buildathon 30x</a:t>
             </a:r>
           </a:p>
         </p:txBody>
@@ -5940,7 +5924,7 @@
                 </a:solidFill>
                 <a:latin typeface="Helvetica Neue"/>
               </a:rPr>
-              <a:t>Tagline: "Where institutional DeFi gets built"</a:t>
+              <a:t>Tagline: "30 days · to the power of x" — the mechanic is encoded in the name: 30 days × rewards to the power of x (the rest stays open).</a:t>
             </a:r>
           </a:p>
         </p:txBody>
@@ -5974,7 +5958,7 @@
                 </a:solidFill>
                 <a:latin typeface="Helvetica Neue"/>
               </a:rPr>
-              <a:t>Short, action-oriented, evokes a workspace where building happens. Continuity with the "XRPL Zone" Paris PWG brand asset (April 2026) without being too tied to it — works as a standalone event name.</a:t>
+              <a:t>The name encodes the program duration (30 days) and signals that the reward pool can scale (x = variable power). Marketing gold: no other crypto buildathon brand uses this pattern (Solana=Colosseum, Arbitrum=Open House, Akindo=WaveHack, ETHGlobal=city-based) — open market position. Final communication vote stays with the marketing team.</a:t>
             </a:r>
           </a:p>
         </p:txBody>
@@ -5987,7 +5971,7 @@
         </p:nvSpPr>
         <p:spPr>
           <a:xfrm>
-            <a:off x="502920" y="3941064"/>
+            <a:off x="502920" y="4343400"/>
             <a:ext cx="11185855" cy="2286000"/>
           </a:xfrm>
           <a:prstGeom prst="rect">
@@ -6013,7 +5997,7 @@
                 </a:solidFill>
                 <a:latin typeface="Helvetica Neue"/>
               </a:rPr>
-              <a:t>• Pros: punchy, action verb, neutral enough to scale beyond a single event, low marketing cost</a:t>
+              <a:t>• Pros: punchy, memorable, scalable (next year we can do 30² or 30³ without changing brand); directly encodes the duration (Section 02) and signals a program with amplification potential</a:t>
             </a:r>
           </a:p>
           <a:p>
@@ -6029,7 +6013,7 @@
                 </a:solidFill>
                 <a:latin typeface="Helvetica Neue"/>
               </a:rPr>
-              <a:t>• Cons: doesn't say "XRPL" — needs a sub-tag for context (e.g. "Building zone · XRPL")</a:t>
+              <a:t>• Cons: doesn't say "XRPL" — needs a sub-tag like "Buildathon 30x · XRPL Commons" for context; minor SEO risk ("30^x" can be read in different ways)</a:t>
             </a:r>
           </a:p>
         </p:txBody>
@@ -7289,7 +7273,7 @@
                 </a:solidFill>
                 <a:latin typeface="Helvetica Neue"/>
               </a:rPr>
-              <a:t>• Tier HIGH (×6 APP challenges) → Grand Prix Bracket. The highest-impact user-facing opps: OPP-018 · B2B Stablecoin FX desk / corridor (infra)</a:t>
+              <a:t>• Tier HIGH (×7 APP challenges) → Grand Prix Bracket. The highest-impact user-facing opps: OPP-017 · B2B Stablecoin FX desk / corridor (b2b)</a:t>
             </a:r>
           </a:p>
           <a:p>
@@ -7305,7 +7289,7 @@
                 </a:solidFill>
                 <a:latin typeface="Helvetica Neue"/>
               </a:rPr>
-              <a:t>• OPP-021 · Lending Protocol on EVM Sidechain (Morpho-style) (lending)</a:t>
+              <a:t>• OPP-030 · Lending Protocol on EVM Sidechain (Morpho-style) (defi)</a:t>
             </a:r>
           </a:p>
           <a:p>
@@ -7321,7 +7305,7 @@
                 </a:solidFill>
                 <a:latin typeface="Helvetica Neue"/>
               </a:rPr>
-              <a:t>• OPP-025 · Lending front-end on Single Asset Vault (pre-XLS-66) (lending)</a:t>
+              <a:t>• OPP-034 · Lending front-end on Single Asset Vault (pre-XLS-66) (defi)</a:t>
             </a:r>
           </a:p>
           <a:p>
@@ -7337,7 +7321,7 @@
                 </a:solidFill>
                 <a:latin typeface="Helvetica Neue"/>
               </a:rPr>
-              <a:t>• OPP-031 · Compliance-native consumer payments (Wise-on-XRPL) (rwa-stable)</a:t>
+              <a:t>• OPP-025 · Compliance-native consumer payments (Wise-on-XRPL) (rwat)</a:t>
             </a:r>
           </a:p>
           <a:p>
@@ -7353,7 +7337,7 @@
                 </a:solidFill>
                 <a:latin typeface="Helvetica Neue"/>
               </a:rPr>
-              <a:t>• OPP-033 · Restaking Protocol for XRP (Babylon-fork) (evm-defi)</a:t>
+              <a:t>• OPP-036 · Restaking Protocol for XRP (Babylon-fork) (defi)</a:t>
             </a:r>
           </a:p>
         </p:txBody>
@@ -7663,7 +7647,7 @@
                 </a:solidFill>
                 <a:latin typeface="Helvetica Neue"/>
               </a:rPr>
-              <a:t>Pool $30k · volume-gated, paid in XRP</a:t>
+              <a:t>Pool $100k · Hybrid milestone-grants + small prizes + Aquarium</a:t>
             </a:r>
           </a:p>
         </p:txBody>
@@ -7697,7 +7681,7 @@
                 </a:solidFill>
                 <a:latin typeface="Helvetica Neue"/>
               </a:rPr>
-              <a:t>Total prize pool $30,000 (distributed in XRP) + perks (Aquarium fast-track, Ripple Investments intro, mentoring)</a:t>
+              <a:t>2026 annual dedicated budget — $100k structured in 3 brackets: $50k in major milestone-grants ($10k × 5) + $50k in small prizes (€500 × up to 100 projects) + Aquarium access for 1st place.</a:t>
             </a:r>
           </a:p>
         </p:txBody>
@@ -7731,7 +7715,7 @@
                 </a:solidFill>
                 <a:latin typeface="Helvetica Neue"/>
               </a:rPr>
-              <a:t>Inspired by the "RFS + live traction" model (Florence interview) — filters out polished demos, rewards builders who understand distribution.</a:t>
+              <a:t>Filters out polished demos, rewards real traction (mainnet + users + volume). Inspired by the "RFS + live traction" model (Florence interview).</a:t>
             </a:r>
           </a:p>
         </p:txBody>
@@ -7744,7 +7728,7 @@
         </p:nvSpPr>
         <p:spPr>
           <a:xfrm>
-            <a:off x="502920" y="3764280"/>
+            <a:off x="502920" y="3773424"/>
             <a:ext cx="11185855" cy="2286000"/>
           </a:xfrm>
           <a:prstGeom prst="rect">
@@ -7786,7 +7770,7 @@
                 </a:solidFill>
                 <a:latin typeface="Helvetica Neue"/>
               </a:rPr>
-              <a:t>• Measurable on-chain activity by day 30: volume · transactions · unique addresses</a:t>
+              <a:t>• Measurable on-chain activity by day 30 via SourceTag: volume · transactions · unique addresses</a:t>
             </a:r>
           </a:p>
         </p:txBody>

--- a/buildathon-deck-en.pptx
+++ b/buildathon-deck-en.pptx
@@ -8513,7 +8513,7 @@
                 </a:solidFill>
                 <a:latin typeface="Helvetica Neue"/>
               </a:rPr>
-              <a:t>4 criteria — simple &amp; weighted</a:t>
+              <a:t>2-step judging — Binary gate, then bracket-specific scoring</a:t>
             </a:r>
           </a:p>
         </p:txBody>
@@ -8547,7 +8547,7 @@
                 </a:solidFill>
                 <a:latin typeface="Helvetica Neue"/>
               </a:rPr>
-              <a:t>Total = 100%, published to candidates upfront</a:t>
+              <a:t>Criteria apply differently depending on the prize bracket (small prizes vs major milestone-grants). All published to candidates upfront.</a:t>
             </a:r>
           </a:p>
         </p:txBody>
@@ -8581,7 +8581,7 @@
                 </a:solidFill>
                 <a:latin typeface="Helvetica Neue"/>
               </a:rPr>
-              <a:t>Simple to communicate, easy to optimize as a team, no overlap. Traction is the new lever (replacing "Distribution thinking" + "Gap fit" combined): in a 30-day full-online format, real signups and demonstrated usage are the most reliable signal of fit.</a:t>
+              <a:t>All-or-nothing criteria by Day 30. Without these 2 conditions, no prize is awarded (cf. Section 05):</a:t>
             </a:r>
           </a:p>
         </p:txBody>
@@ -8589,6 +8589,61 @@
       <p:sp>
         <p:nvSpPr>
           <p:cNvPr id="10" name="TextBox 9"/>
+          <p:cNvSpPr txBox="1"/>
+          <p:nvPr/>
+        </p:nvSpPr>
+        <p:spPr>
+          <a:xfrm>
+            <a:off x="502920" y="3642360"/>
+            <a:ext cx="11185855" cy="2286000"/>
+          </a:xfrm>
+          <a:prstGeom prst="rect">
+            <a:avLst/>
+          </a:prstGeom>
+          <a:noFill/>
+        </p:spPr>
+        <p:txBody>
+          <a:bodyPr wrap="square">
+            <a:spAutoFit/>
+          </a:bodyPr>
+          <a:lstStyle/>
+          <a:p>
+            <a:pPr>
+              <a:spcAft>
+                <a:spcPts val="400"/>
+              </a:spcAft>
+            </a:pPr>
+            <a:r>
+              <a:rPr sz="1200">
+                <a:solidFill>
+                  <a:srgbClr val="0E1116"/>
+                </a:solidFill>
+                <a:latin typeface="Helvetica Neue"/>
+              </a:rPr>
+              <a:t>• Mainnet deployment — project deployed and accessible on XRPL mainnet, source code published (or justified if proprietary)</a:t>
+            </a:r>
+          </a:p>
+          <a:p>
+            <a:pPr>
+              <a:spcAft>
+                <a:spcPts val="400"/>
+              </a:spcAft>
+            </a:pPr>
+            <a:r>
+              <a:rPr sz="1200">
+                <a:solidFill>
+                  <a:srgbClr val="0E1116"/>
+                </a:solidFill>
+                <a:latin typeface="Helvetica Neue"/>
+              </a:rPr>
+              <a:t>• Measurable on-chain activity via SourceTag — at least 1 real transaction attributable to the project via SourceTag, verifiable by the jury on XRPL explorer</a:t>
+            </a:r>
+          </a:p>
+        </p:txBody>
+      </p:sp>
+      <p:sp>
+        <p:nvSpPr>
+          <p:cNvPr id="11" name="TextBox 10"/>
           <p:cNvSpPr txBox="1"/>
           <p:nvPr/>
         </p:nvSpPr>
@@ -8623,7 +8678,7 @@
       </p:sp>
       <p:sp>
         <p:nvSpPr>
-          <p:cNvPr id="11" name="TextBox 10"/>
+          <p:cNvPr id="12" name="TextBox 11"/>
           <p:cNvSpPr txBox="1"/>
           <p:nvPr/>
         </p:nvSpPr>

--- a/buildathon-deck-en.pptx
+++ b/buildathon-deck-en.pptx
@@ -3665,7 +3665,7 @@
                 </a:solidFill>
                 <a:latin typeface="Helvetica Neue"/>
               </a:rPr>
-              <a:t>Solo or team — no min, no max</a:t>
+              <a:t>Solo or team — no minimum, no maximum, no profile requirements</a:t>
             </a:r>
           </a:p>
         </p:txBody>
@@ -3699,7 +3699,7 @@
                 </a:solidFill>
                 <a:latin typeface="Helvetica Neue"/>
               </a:rPr>
-              <a:t>Maximum accessibility — anyone can apply, alone or with cofounders</a:t>
+              <a:t>Maximum accessibility — anyone can apply, alone or with any cofounders. No prior profile required.</a:t>
             </a:r>
           </a:p>
         </p:txBody>
@@ -3738,7 +3738,7 @@
                 </a:solidFill>
                 <a:latin typeface="Helvetica Neue"/>
               </a:rPr>
-              <a:t>• No minimum — solo applicants are welcome and eligible for all prize tiers</a:t>
+              <a:t>• No minimum — solo applicants are welcome and eligible for all prize tiers (small prizes + major milestone-grants + Aquarium access)</a:t>
             </a:r>
           </a:p>
           <a:p>
@@ -3754,7 +3754,7 @@
                 </a:solidFill>
                 <a:latin typeface="Helvetica Neue"/>
               </a:rPr>
-              <a:t>• No maximum — teams of any size can apply (but jury weights individual contribution clarity in scoring)</a:t>
+              <a:t>• No maximum — teams of any size can apply</a:t>
             </a:r>
           </a:p>
           <a:p>
@@ -3770,7 +3770,7 @@
                 </a:solidFill>
                 <a:latin typeface="Helvetica Neue"/>
               </a:rPr>
-              <a:t>• Geographic diversity encouraged — fully online format means anyone, anywhere can compete</a:t>
+              <a:t>• No profile required — no minimum XRPL experience, no minimum crypto experience, no seniority required. If you can build, you're eligible.</a:t>
             </a:r>
           </a:p>
           <a:p>
@@ -3786,7 +3786,23 @@
                 </a:solidFill>
                 <a:latin typeface="Helvetica Neue"/>
               </a:rPr>
-              <a:t>• Aquarium / Hackathon alumni are eligible for the dedicated "From the community" prize (€500)</a:t>
+              <a:t>• Geographic diversity encouraged — fully online format + optional 1 IRL day/week at the Commons House (Paris) means anyone, anywhere can compete</a:t>
+            </a:r>
+          </a:p>
+          <a:p>
+            <a:pPr>
+              <a:spcAft>
+                <a:spcPts val="400"/>
+              </a:spcAft>
+            </a:pPr>
+            <a:r>
+              <a:rPr sz="1200">
+                <a:solidFill>
+                  <a:srgbClr val="0E1116"/>
+                </a:solidFill>
+                <a:latin typeface="Helvetica Neue"/>
+              </a:rPr>
+              <a:t>• Aquarium / Hackathon alumni are eligible for all prizes without distinction (the former "From the community" prize was removed)</a:t>
             </a:r>
           </a:p>
         </p:txBody>
@@ -6446,7 +6462,7 @@
                 </a:solidFill>
                 <a:latin typeface="Helvetica Neue"/>
               </a:rPr>
-              <a:t>• Day 1 → Day 28: Build phase — 2 office-hour sessions/week (30min each)</a:t>
+              <a:t>• Day 1 → Day 28: Build phase — 2 office-hour sessions/week (30min each) + Build at the Commons House 1 day/week (cf. Section 09)</a:t>
             </a:r>
           </a:p>
           <a:p>
@@ -7166,7 +7182,7 @@
                 </a:solidFill>
                 <a:latin typeface="Helvetica Neue"/>
               </a:rPr>
-              <a:t>Registry /opportunities — 39 APP opportunities, 7 themes</a:t>
+              <a:t>Registry /opportunities — 41 APP opportunities, 5 themes</a:t>
             </a:r>
           </a:p>
         </p:txBody>
@@ -7200,7 +7216,7 @@
                 </a:solidFill>
                 <a:latin typeface="Helvetica Neue"/>
               </a:rPr>
-              <a:t>The Buildathon challenge register = the APP subset of the unified registry /opportunities (single source of truth · convergence PWG + ATKA + ECO + YC + interviews). The 24 TOOL opps (libraries, primitives, SDKs) are out of scope for the Buildathon — intended for existing teams / core contributors.</a:t>
+              <a:t>The Buildathon challenge register = the APP subset of the unified registry /opportunities (single source of truth · convergence PWG + ATKA + ECO + YC + interviews). The 26 TOOL opps (libraries, primitives, SDKs) are out of scope for the Buildathon — intended for existing teams / core contributors.</a:t>
             </a:r>
           </a:p>
         </p:txBody>
@@ -8080,7 +8096,7 @@
                 </a:solidFill>
                 <a:latin typeface="Helvetica Neue"/>
               </a:rPr>
-              <a:t>XRPL Commons (only)</a:t>
+              <a:t>XRPL Commons team · composition to be finalized</a:t>
             </a:r>
           </a:p>
         </p:txBody>
@@ -8114,7 +8130,7 @@
                 </a:solidFill>
                 <a:latin typeface="Helvetica Neue"/>
               </a:rPr>
-              <a:t>Single-organization jury — clean ownership, fast decisions</a:t>
+              <a:t>Single-organization jury — clean ownership, fast decisions. Names finalized internally.</a:t>
             </a:r>
           </a:p>
         </p:txBody>
@@ -8148,7 +8164,7 @@
                 </a:solidFill>
                 <a:latin typeface="Helvetica Neue"/>
               </a:rPr>
-              <a:t>XRPL Commons runs the jury alone. Knows the builders, knows the Atlas roadmap, owns the program quality. No coordination overhead, no scheduling nightmare, clear accountability if a result is contested.</a:t>
+              <a:t>The XRPL Commons team runs the jury alone. Knows the builders, owns the roadmap, the program quality and the Section 07 criteria evaluation. No coordination overhead, no scheduling nightmare, clear accountability if a result is contested. Exact composition (titular jurors + alternates) decided internally, no public announcement of names.</a:t>
             </a:r>
           </a:p>
         </p:txBody>
@@ -8161,7 +8177,7 @@
         </p:nvSpPr>
         <p:spPr>
           <a:xfrm>
-            <a:off x="502920" y="3953256"/>
+            <a:off x="502920" y="4343400"/>
             <a:ext cx="11185855" cy="2286000"/>
           </a:xfrm>
           <a:prstGeom prst="rect">
@@ -8203,7 +8219,7 @@
                 </a:solidFill>
                 <a:latin typeface="Helvetica Neue"/>
               </a:rPr>
-              <a:t>• Cons: no external advocacy/accountability balance — risk of being seen as too internal</a:t>
+              <a:t>• Cons: no external advocacy/accountability balance — risk of being seen as too internal (mitigated by the transparency of Section 07 criteria and the public M1/M2 milestones validation)</a:t>
             </a:r>
           </a:p>
         </p:txBody>
